--- a/education/vibe-coding-training/02_개념_서사.pptx
+++ b/education/vibe-coding-training/02_개념_서사.pptx
@@ -936,7 +936,7 @@
                   <a:srgbClr val="8899BB"/>
                 </a:solidFill>
               </a:rPr>
-              <a:t>: 2026-06-28  </a:t>
+              <a:t>: 2026-07-15   </a:t>
             </a:r>
             <a:r>
               <a:rPr lang="en-US" sz="1050" b="1" dirty="0">
@@ -955,124 +955,31 @@
               <a:t>  </a:t>
             </a:r>
             <a:r>
+              <a:rPr lang="ko-KR" altLang="en-US" sz="1050" b="1" dirty="0" err="1">
+                <a:solidFill>
+                  <a:srgbClr val="8899BB"/>
+                </a:solidFill>
+              </a:rPr>
+              <a:t>바이브코딩의</a:t>
+            </a:r>
+            <a:r>
+              <a:rPr lang="ko-KR" altLang="en-US" sz="1050" b="1" dirty="0">
+                <a:solidFill>
+                  <a:srgbClr val="8899BB"/>
+                </a:solidFill>
+              </a:rPr>
+              <a:t> 개념 발전</a:t>
+            </a:r>
+            <a:r>
+              <a:rPr lang="en-US" sz="1050" dirty="0">
+                <a:solidFill>
+                  <a:srgbClr val="8899BB"/>
+                </a:solidFill>
+              </a:rPr>
+              <a:t> </a:t>
+            </a:r>
+            <a:r>
               <a:rPr lang="en-US" sz="1050" b="1" dirty="0">
-                <a:solidFill>
-                  <a:srgbClr val="8899BB"/>
-                </a:solidFill>
-              </a:rPr>
-              <a:t>대상</a:t>
-            </a:r>
-            <a:r>
-              <a:rPr lang="en-US" sz="1050" dirty="0">
-                <a:solidFill>
-                  <a:srgbClr val="8899BB"/>
-                </a:solidFill>
-              </a:rPr>
-              <a:t>: AI 시대 개발의 3단 발전과 그 끝에 남는 것 · </a:t>
-            </a:r>
-            <a:r>
-              <a:rPr lang="en-US" sz="1050" dirty="0" err="1">
-                <a:solidFill>
-                  <a:srgbClr val="8899BB"/>
-                </a:solidFill>
-              </a:rPr>
-              <a:t>VSCode</a:t>
-            </a:r>
-            <a:r>
-              <a:rPr lang="en-US" sz="1050" dirty="0">
-                <a:solidFill>
-                  <a:srgbClr val="8899BB"/>
-                </a:solidFill>
-              </a:rPr>
-              <a:t> </a:t>
-            </a:r>
-            <a:r>
-              <a:rPr lang="en-US" sz="1050" b="1" dirty="0">
-                <a:solidFill>
-                  <a:srgbClr val="8899BB"/>
-                </a:solidFill>
-              </a:rPr>
-              <a:t>|</a:t>
-            </a:r>
-            <a:r>
-              <a:rPr lang="en-US" sz="1050" dirty="0">
-                <a:solidFill>
-                  <a:srgbClr val="8899BB"/>
-                </a:solidFill>
-              </a:rPr>
-              <a:t> </a:t>
-            </a:r>
-            <a:r>
-              <a:rPr lang="ko-KR" altLang="en-US" sz="1050" b="1" dirty="0">
-                <a:solidFill>
-                  <a:srgbClr val="8899BB"/>
-                </a:solidFill>
-              </a:rPr>
-              <a:t>가이드문서</a:t>
-            </a:r>
-            <a:r>
-              <a:rPr lang="ko-KR" altLang="en-US" sz="1050" dirty="0">
-                <a:solidFill>
-                  <a:srgbClr val="8899BB"/>
-                </a:solidFill>
-              </a:rPr>
-              <a:t> </a:t>
-            </a:r>
-            <a:r>
-              <a:rPr lang="en-US" altLang="ko-KR" sz="1050" dirty="0">
-                <a:solidFill>
-                  <a:srgbClr val="8899BB"/>
-                </a:solidFill>
-              </a:rPr>
-              <a:t>: </a:t>
-            </a:r>
-            <a:r>
-              <a:rPr lang="en-US" altLang="ko-KR" sz="1050" dirty="0">
-                <a:solidFill>
-                  <a:srgbClr val="8899BB"/>
-                </a:solidFill>
-                <a:hlinkClick r:id="rId3"/>
-              </a:rPr>
-              <a:t>AI </a:t>
-            </a:r>
-            <a:r>
-              <a:rPr lang="ko-KR" altLang="en-US" sz="1050" dirty="0">
-                <a:solidFill>
-                  <a:srgbClr val="8899BB"/>
-                </a:solidFill>
-                <a:hlinkClick r:id="rId3"/>
-              </a:rPr>
-              <a:t>개념 파트</a:t>
-            </a:r>
-            <a:r>
-              <a:rPr lang="en-US" altLang="ko-KR" sz="1050" dirty="0">
-                <a:solidFill>
-                  <a:srgbClr val="8899BB"/>
-                </a:solidFill>
-                <a:hlinkClick r:id="rId3"/>
-              </a:rPr>
-              <a:t>(</a:t>
-            </a:r>
-            <a:r>
-              <a:rPr lang="ko-KR" altLang="en-US" sz="1050" dirty="0">
-                <a:solidFill>
-                  <a:srgbClr val="8899BB"/>
-                </a:solidFill>
-                <a:hlinkClick r:id="rId3"/>
-              </a:rPr>
-              <a:t>개발환경 세팅</a:t>
-            </a:r>
-            <a:r>
-              <a:rPr lang="en-US" altLang="ko-KR" sz="1050" dirty="0">
-                <a:solidFill>
-                  <a:srgbClr val="8899BB"/>
-                </a:solidFill>
-                <a:hlinkClick r:id="rId3"/>
-              </a:rPr>
-              <a:t>)</a:t>
-            </a:r>
-            <a:r>
-              <a:rPr lang="en-US" altLang="ko-KR" sz="1050" b="1" dirty="0">
                 <a:solidFill>
                   <a:srgbClr val="8899BB"/>
                 </a:solidFill>
@@ -1496,7 +1403,7 @@
                 <a:ea typeface="Arial Black" pitchFamily="34" charset="-122"/>
                 <a:cs typeface="Arial Black" pitchFamily="34" charset="-120"/>
               </a:rPr>
-              <a:t>문서(프롬프트)를 쓰는 능력</a:t>
+              <a:t>문서를 쓰고 질의하는 능력</a:t>
             </a:r>
           </a:p>
         </p:txBody>
@@ -2264,7 +2171,7 @@
                 <a:ea typeface="Arial Black" pitchFamily="34" charset="-122"/>
                 <a:cs typeface="Arial Black" pitchFamily="34" charset="-120"/>
               </a:rPr>
-              <a:t>문서를 쓰는 능력</a:t>
+              <a:t>문서를 쓰고 질의하는 능력</a:t>
             </a:r>
             <a:r>
               <a:rPr lang="ko-KR" altLang="en-US" sz="4400" b="1" dirty="0">
@@ -2306,7 +2213,7 @@
               <a:buNone/>
             </a:pPr>
             <a:r>
-              <a:rPr lang="ko-KR" altLang="en-US" sz="3600" b="1">
+              <a:rPr lang="ko-KR" altLang="en-US" sz="3600" b="1" dirty="0" err="1">
                 <a:solidFill>
                   <a:srgbClr val="FFFFFF"/>
                 </a:solidFill>
@@ -2317,7 +2224,7 @@
               <a:t>A</a:t>
             </a:r>
             <a:r>
-              <a:rPr lang="en-US" altLang="ko-KR" sz="3600" b="1">
+              <a:rPr lang="en-US" altLang="ko-KR" sz="3600" b="1" dirty="0">
                 <a:solidFill>
                   <a:srgbClr val="FFFFFF"/>
                 </a:solidFill>
@@ -2328,7 +2235,7 @@
               <a:t>I </a:t>
             </a:r>
             <a:r>
-              <a:rPr lang="ko-KR" altLang="en-US" sz="3600" b="1">
+              <a:rPr lang="ko-KR" altLang="en-US" sz="3600" b="1" dirty="0">
                 <a:solidFill>
                   <a:srgbClr val="FFFFFF"/>
                 </a:solidFill>
@@ -2336,7 +2243,7 @@
                 <a:ea typeface="Arial Black" pitchFamily="34" charset="-122"/>
                 <a:cs typeface="Arial Black" pitchFamily="34" charset="-120"/>
               </a:rPr>
-              <a:t>시대의 핵심 역량</a:t>
+              <a:t>활용한 코딩의 핵심 역량</a:t>
             </a:r>
             <a:endParaRPr lang="en-US" sz="3600" dirty="0"/>
           </a:p>
@@ -2367,28 +2274,20 @@
               <a:buNone/>
             </a:pPr>
             <a:r>
+              <a:rPr lang="ko-KR" altLang="en-US" sz="1400" i="1" dirty="0" err="1">
+                <a:solidFill>
+                  <a:srgbClr val="4FC3F7"/>
+                </a:solidFill>
+              </a:rPr>
+              <a:t>바이브코딩</a:t>
+            </a:r>
+            <a:r>
               <a:rPr lang="ko-KR" altLang="en-US" sz="1400" i="1" dirty="0">
                 <a:solidFill>
-                  <a:srgbClr val="8899BB"/>
-                </a:solidFill>
-              </a:rPr>
-              <a:t>이 한 문장에 도착하기까지 </a:t>
-            </a:r>
-            <a:r>
-              <a:rPr lang="en-US" sz="1400" b="1" i="1" dirty="0">
-                <a:solidFill>
-                  <a:srgbClr val="C8DCFC"/>
-                </a:solidFill>
-              </a:rPr>
-              <a:t>3단계</a:t>
-            </a:r>
-            <a:r>
-              <a:rPr lang="ko-KR" altLang="en-US" sz="1400" i="1" dirty="0">
-                <a:solidFill>
-                  <a:srgbClr val="8899BB"/>
-                </a:solidFill>
-              </a:rPr>
-              <a:t>를 밟아봅니다  </a:t>
+                  <a:srgbClr val="4FC3F7"/>
+                </a:solidFill>
+              </a:rPr>
+              <a:t> 개념의 발전 </a:t>
             </a:r>
             <a:r>
               <a:rPr lang="en-US" sz="1400" i="1" dirty="0">
@@ -3630,7 +3529,7 @@
                   <a:srgbClr val="1E2761"/>
                 </a:solidFill>
               </a:rPr>
-              <a:t>①  맥락 공급</a:t>
+              <a:t>①  문서 작성</a:t>
             </a:r>
             <a:r>
               <a:rPr lang="ko-KR" altLang="en-US" sz="1200" dirty="0">
@@ -4331,7 +4230,7 @@
                   <a:srgbClr val="1E2761"/>
                 </a:solidFill>
               </a:rPr>
-              <a:t>이 4가지가 </a:t>
+              <a:t>이런 규칙이 </a:t>
             </a:r>
             <a:r>
               <a:rPr lang="ko-KR" altLang="en-US" sz="1500" b="1" dirty="0">
@@ -4347,7 +4246,7 @@
                   <a:srgbClr val="1E2761"/>
                 </a:solidFill>
               </a:rPr>
-              <a:t>는 결과가 안 흔들린다  </a:t>
+              <a:t>는 결과가 흔들리지 않는다 </a:t>
             </a:r>
             <a:r>
               <a:rPr lang="ko-KR" altLang="en-US" sz="1500" b="1" dirty="0">
@@ -4633,7 +4532,23 @@
                   <a:srgbClr val="F87171"/>
                 </a:solidFill>
               </a:rPr>
-              <a:t>⚠️  말버릇은 휘발된다</a:t>
+              <a:t>⚠️  </a:t>
+            </a:r>
+            <a:r>
+              <a:rPr lang="ko-KR" altLang="en-US" sz="1200" b="1" dirty="0">
+                <a:solidFill>
+                  <a:srgbClr val="F87171"/>
+                </a:solidFill>
+              </a:rPr>
+              <a:t>단순 프롬프트는</a:t>
+            </a:r>
+            <a:r>
+              <a:rPr lang="en-US" sz="1200" b="1" dirty="0">
+                <a:solidFill>
+                  <a:srgbClr val="F87171"/>
+                </a:solidFill>
+              </a:rPr>
+              <a:t> 휘발된다</a:t>
             </a:r>
           </a:p>
           <a:p>
@@ -4659,8 +4574,29 @@
                   <a:srgbClr val="6B7280"/>
                 </a:solidFill>
               </a:rPr>
-              <a:t>· 다음 사람은 내 말버릇을 모른다</a:t>
-            </a:r>
+              <a:t>· 다음 사람은 내 프롬프트를 알 </a:t>
+            </a:r>
+            <a:r>
+              <a:rPr lang="ko-KR" altLang="en-US" sz="1300" dirty="0" err="1">
+                <a:solidFill>
+                  <a:srgbClr val="6B7280"/>
+                </a:solidFill>
+              </a:rPr>
+              <a:t>수없다</a:t>
+            </a:r>
+            <a:r>
+              <a:rPr lang="en-US" altLang="ko-KR" sz="1300" dirty="0">
+                <a:solidFill>
+                  <a:srgbClr val="6B7280"/>
+                </a:solidFill>
+              </a:rPr>
+              <a:t>.</a:t>
+            </a:r>
+            <a:endParaRPr lang="ko-KR" altLang="en-US" sz="1300" dirty="0">
+              <a:solidFill>
+                <a:srgbClr val="6B7280"/>
+              </a:solidFill>
+            </a:endParaRPr>
           </a:p>
           <a:p>
             <a:pPr marL="0" indent="0">
@@ -4672,8 +4608,21 @@
                   <a:srgbClr val="6B7280"/>
                 </a:solidFill>
               </a:rPr>
-              <a:t>· 팀 단위 재현성이 없다</a:t>
-            </a:r>
+              <a:t>· 팀 단위의 재현성 및 구조화에는 제한이 있다</a:t>
+            </a:r>
+            <a:r>
+              <a:rPr lang="en-US" altLang="ko-KR" sz="1300" dirty="0">
+                <a:solidFill>
+                  <a:srgbClr val="6B7280"/>
+                </a:solidFill>
+              </a:rPr>
+              <a:t>.</a:t>
+            </a:r>
+            <a:endParaRPr lang="ko-KR" altLang="en-US" sz="1300" dirty="0">
+              <a:solidFill>
+                <a:srgbClr val="6B7280"/>
+              </a:solidFill>
+            </a:endParaRPr>
           </a:p>
         </p:txBody>
       </p:sp>
@@ -4733,7 +4682,7 @@
                   <a:srgbClr val="1E2761"/>
                 </a:solidFill>
               </a:rPr>
-              <a:t>→  말버릇이 아니라 </a:t>
+              <a:t>→  단순 프롬프트가 아니라 </a:t>
             </a:r>
             <a:r>
               <a:rPr lang="ko-KR" altLang="en-US" sz="1500" b="1" dirty="0">
@@ -4749,7 +4698,7 @@
                   <a:srgbClr val="1E2761"/>
                 </a:solidFill>
               </a:rPr>
-              <a:t> 팀·시간에 남는다</a:t>
+              <a:t> 팀단위의 재현성과 구조가 남는다</a:t>
             </a:r>
             <a:endParaRPr lang="en-US" sz="1500" dirty="0"/>
           </a:p>
@@ -4958,7 +4907,15 @@
                   <a:srgbClr val="6B7280"/>
                 </a:solidFill>
               </a:rPr>
-              <a:t>말이 아니라, 문서로 구조를 미리 깐다</a:t>
+              <a:t>프롬프트가 아니라, 문서와 규칙으로 구조를 미리 정한다</a:t>
+            </a:r>
+            <a:r>
+              <a:rPr lang="en-US" altLang="ko-KR" sz="1600" i="1" dirty="0">
+                <a:solidFill>
+                  <a:srgbClr val="6B7280"/>
+                </a:solidFill>
+              </a:rPr>
+              <a:t>.</a:t>
             </a:r>
             <a:endParaRPr lang="en-US" sz="1600" dirty="0"/>
           </a:p>
@@ -5005,7 +4962,7 @@
         </p:nvSpPr>
         <p:spPr>
           <a:xfrm>
-            <a:off x="3400000" y="2200000"/>
+            <a:off x="3400000" y="2184098"/>
             <a:ext cx="5144000" cy="1600000"/>
           </a:xfrm>
           <a:prstGeom prst="rect">
@@ -5027,20 +4984,114 @@
                   <a:srgbClr val="34D399"/>
                 </a:solidFill>
               </a:rPr>
-              <a:t>🐎  Harness = 마구 · 안전벨트</a:t>
-            </a:r>
+              <a:t>🐎  Harness = 마구 · </a:t>
+            </a:r>
+            <a:r>
+              <a:rPr lang="en-US" sz="1200" b="1" dirty="0" err="1">
+                <a:solidFill>
+                  <a:srgbClr val="34D399"/>
+                </a:solidFill>
+              </a:rPr>
+              <a:t>안전벨트</a:t>
+            </a:r>
+            <a:endParaRPr lang="en-US" sz="1200" b="1" dirty="0">
+              <a:solidFill>
+                <a:srgbClr val="34D399"/>
+              </a:solidFill>
+            </a:endParaRPr>
           </a:p>
           <a:p>
             <a:pPr marL="0" indent="0">
               <a:buNone/>
             </a:pPr>
+            <a:endParaRPr lang="en-US" sz="1200" b="1" dirty="0">
+              <a:solidFill>
+                <a:srgbClr val="34D399"/>
+              </a:solidFill>
+            </a:endParaRPr>
+          </a:p>
+          <a:p>
+            <a:pPr marL="0" indent="0">
+              <a:buNone/>
+            </a:pPr>
+            <a:r>
+              <a:rPr lang="ko-KR" altLang="en-US" sz="1300" dirty="0" err="1">
+                <a:solidFill>
+                  <a:srgbClr val="1E2761"/>
+                </a:solidFill>
+              </a:rPr>
+              <a:t>AI를</a:t>
+            </a:r>
             <a:r>
               <a:rPr lang="ko-KR" altLang="en-US" sz="1300" dirty="0">
                 <a:solidFill>
                   <a:srgbClr val="1E2761"/>
                 </a:solidFill>
               </a:rPr>
-              <a:t>힘 센 놈(AI)을 마음대로 놔두지 않고,</a:t>
+              <a:t> 말</a:t>
+            </a:r>
+            <a:r>
+              <a:rPr lang="en-US" altLang="ko-KR" sz="1400" b="1" dirty="0">
+                <a:solidFill>
+                  <a:srgbClr val="34D399"/>
+                </a:solidFill>
+              </a:rPr>
+              <a:t> (🐎) </a:t>
+            </a:r>
+            <a:r>
+              <a:rPr lang="ko-KR" altLang="en-US" sz="1300" dirty="0">
+                <a:solidFill>
+                  <a:srgbClr val="1E2761"/>
+                </a:solidFill>
+              </a:rPr>
+              <a:t>로 비유 했을 때, </a:t>
+            </a:r>
+            <a:br>
+              <a:rPr lang="en-US" altLang="ko-KR" sz="1300" dirty="0">
+                <a:solidFill>
+                  <a:srgbClr val="1E2761"/>
+                </a:solidFill>
+              </a:rPr>
+            </a:br>
+            <a:r>
+              <a:rPr lang="ko-KR" altLang="en-US" sz="1300" dirty="0" err="1">
+                <a:solidFill>
+                  <a:srgbClr val="1E2761"/>
+                </a:solidFill>
+              </a:rPr>
+              <a:t>하네스를</a:t>
+            </a:r>
+            <a:r>
+              <a:rPr lang="ko-KR" altLang="en-US" sz="1300" dirty="0">
+                <a:solidFill>
+                  <a:srgbClr val="1E2761"/>
+                </a:solidFill>
+              </a:rPr>
+              <a:t> 통해 </a:t>
+            </a:r>
+            <a:r>
+              <a:rPr lang="en-US" altLang="ko-KR" sz="1300" dirty="0">
+                <a:solidFill>
+                  <a:srgbClr val="1E2761"/>
+                </a:solidFill>
+              </a:rPr>
+              <a:t>AI</a:t>
+            </a:r>
+            <a:r>
+              <a:rPr lang="ko-KR" altLang="en-US" sz="1300" dirty="0">
+                <a:solidFill>
+                  <a:srgbClr val="1E2761"/>
+                </a:solidFill>
+              </a:rPr>
+              <a:t>를 정해진 방향으로만 쓰이도록 </a:t>
+            </a:r>
+            <a:r>
+              <a:rPr lang="ko-KR" altLang="en-US" sz="1300" b="1" dirty="0">
+                <a:solidFill>
+                  <a:srgbClr val="34D399"/>
+                </a:solidFill>
+              </a:rPr>
+              <a:t>잡아주는 장치</a:t>
             </a:r>
           </a:p>
           <a:p>
@@ -5048,33 +5099,12 @@
               <a:buNone/>
             </a:pPr>
             <a:r>
-              <a:rPr lang="ko-KR" altLang="en-US" sz="1300" dirty="0">
-                <a:solidFill>
-                  <a:srgbClr val="1E2761"/>
-                </a:solidFill>
-              </a:rPr>
-              <a:t>정해진 방향으로만 쓰이도록 </a:t>
-            </a:r>
-            <a:r>
-              <a:rPr lang="ko-KR" altLang="en-US" sz="1300" b="1" dirty="0">
-                <a:solidFill>
-                  <a:srgbClr val="34D399"/>
-                </a:solidFill>
-              </a:rPr>
-              <a:t>잡아주는 장치</a:t>
-            </a:r>
-          </a:p>
-          <a:p>
-            <a:pPr marL="0" indent="0">
-              <a:buNone/>
-            </a:pPr>
-            <a:r>
               <a:rPr lang="ko-KR" altLang="en-US" sz="1300" i="1" dirty="0">
                 <a:solidFill>
                   <a:srgbClr val="6B7280"/>
                 </a:solidFill>
               </a:rPr>
-              <a:t>= AI를 우리 팀 기준으로만 쓰게 하는 구조</a:t>
+              <a:t>= AI를 우리 특정 기준으로 쓰게 하는 구조 및 규칙</a:t>
             </a:r>
           </a:p>
         </p:txBody>
@@ -5135,7 +5165,7 @@
                   <a:srgbClr val="1E2761"/>
                 </a:solidFill>
               </a:rPr>
-              <a:t>개인기가 아니라 </a:t>
+              <a:t>개인 프롬프트가 아닌 </a:t>
             </a:r>
             <a:r>
               <a:rPr lang="ko-KR" altLang="en-US" sz="1500" b="1" dirty="0">
@@ -5143,7 +5173,7 @@
                   <a:srgbClr val="34D399"/>
                 </a:solidFill>
               </a:rPr>
-              <a:t>반복 가능한 팀 시스템</a:t>
+              <a:t>반복 사용이 가능한 시스템</a:t>
             </a:r>
             <a:r>
               <a:rPr lang="ko-KR" altLang="en-US" sz="1500" b="1" dirty="0">
@@ -5151,7 +5181,23 @@
                   <a:srgbClr val="1E2761"/>
                 </a:solidFill>
               </a:rPr>
-              <a:t> · 무엇을 문서로 굳히나?</a:t>
+              <a:t> —</a:t>
+            </a:r>
+            <a:r>
+              <a:rPr lang="en-US" altLang="ko-KR" sz="1500" b="1" dirty="0">
+                <a:solidFill>
+                  <a:srgbClr val="1E2761"/>
+                </a:solidFill>
+              </a:rPr>
+              <a:t> </a:t>
+            </a:r>
+            <a:r>
+              <a:rPr lang="ko-KR" altLang="en-US" sz="1500" b="1" dirty="0">
+                <a:solidFill>
+                  <a:srgbClr val="1E2761"/>
+                </a:solidFill>
+              </a:rPr>
+              <a:t>무엇을 문서로 굳히나?</a:t>
             </a:r>
             <a:endParaRPr lang="en-US" sz="1500" dirty="0"/>
           </a:p>
@@ -5324,7 +5370,7 @@
                 <a:ea typeface="Arial Black" pitchFamily="34" charset="-122"/>
                 <a:cs typeface="Arial Black" pitchFamily="34" charset="-120"/>
               </a:rPr>
-              <a:t>문서로 굳히는 4단계 흐름</a:t>
+              <a:t>문서로 굳히는 흐름과 규칙</a:t>
             </a:r>
             <a:endParaRPr lang="en-US" sz="3200" dirty="0"/>
           </a:p>
@@ -5421,7 +5467,7 @@
                   <a:srgbClr val="34D399"/>
                 </a:solidFill>
               </a:rPr>
-              <a:t>① 설계 먼저</a:t>
+              <a:t>설계</a:t>
             </a:r>
             <a:endParaRPr lang="en-US" sz="1300" dirty="0"/>
           </a:p>
@@ -5504,7 +5550,7 @@
                   <a:srgbClr val="34D399"/>
                 </a:solidFill>
               </a:rPr>
-              <a:t>② 컨텍스트 고정</a:t>
+              <a:t>컨텍스트</a:t>
             </a:r>
             <a:endParaRPr lang="en-US" sz="1300" dirty="0"/>
           </a:p>
@@ -5518,7 +5564,23 @@
                   <a:srgbClr val="6B7280"/>
                 </a:solidFill>
               </a:rPr>
-              <a:t>팀 규칙·아키텍처 명시</a:t>
+              <a:t>결과를 만드는 </a:t>
+            </a:r>
+            <a:r>
+              <a:rPr lang="ko-KR" altLang="en-US" sz="1100" dirty="0" err="1">
+                <a:solidFill>
+                  <a:srgbClr val="6B7280"/>
+                </a:solidFill>
+              </a:rPr>
+              <a:t>규칙·아키텍처</a:t>
+            </a:r>
+            <a:r>
+              <a:rPr lang="ko-KR" altLang="en-US" sz="1100" dirty="0">
+                <a:solidFill>
+                  <a:srgbClr val="6B7280"/>
+                </a:solidFill>
+              </a:rPr>
+              <a:t> 등</a:t>
             </a:r>
             <a:endParaRPr lang="en-US" sz="1100" dirty="0"/>
           </a:p>
@@ -5587,7 +5649,7 @@
                   <a:srgbClr val="34D399"/>
                 </a:solidFill>
               </a:rPr>
-              <a:t>③ 작은 단위 구현</a:t>
+              <a:t>작은 단위의 계획</a:t>
             </a:r>
             <a:endParaRPr lang="en-US" sz="1300" dirty="0"/>
           </a:p>
@@ -5596,12 +5658,20 @@
               <a:buNone/>
             </a:pPr>
             <a:r>
+              <a:rPr lang="ko-KR" altLang="en-US" sz="1100" dirty="0" err="1">
+                <a:solidFill>
+                  <a:srgbClr val="6B7280"/>
+                </a:solidFill>
+              </a:rPr>
+              <a:t>단계·화면·기능으로</a:t>
+            </a:r>
+            <a:r>
               <a:rPr lang="ko-KR" altLang="en-US" sz="1100" dirty="0">
                 <a:solidFill>
                   <a:srgbClr val="6B7280"/>
                 </a:solidFill>
               </a:rPr>
-              <a:t>Phase·화면·기능으로 쪼갬</a:t>
+              <a:t> 쪼갬</a:t>
             </a:r>
             <a:endParaRPr lang="en-US" sz="1100" dirty="0"/>
           </a:p>
@@ -5670,7 +5740,7 @@
                   <a:srgbClr val="34D399"/>
                 </a:solidFill>
               </a:rPr>
-              <a:t>④ 품질 확인</a:t>
+              <a:t>품질</a:t>
             </a:r>
             <a:endParaRPr lang="en-US" sz="1300" dirty="0"/>
           </a:p>
@@ -5746,7 +5816,7 @@
                   <a:srgbClr val="1E2761"/>
                 </a:solidFill>
               </a:rPr>
-              <a:t>이 흐름을 </a:t>
+              <a:t>흐름과 규칙 자체를 </a:t>
             </a:r>
             <a:r>
               <a:rPr lang="ko-KR" altLang="en-US" sz="1500" b="1" dirty="0">
@@ -5754,17 +5824,37 @@
                   <a:srgbClr val="34D399"/>
                 </a:solidFill>
               </a:rPr>
-              <a:t>.md 파일로 굳혀두면</a:t>
+              <a:t>.md 파일로 </a:t>
+            </a:r>
+            <a:r>
+              <a:rPr lang="ko-KR" altLang="en-US" sz="1500" b="1" dirty="0" err="1">
+                <a:solidFill>
+                  <a:srgbClr val="34D399"/>
+                </a:solidFill>
+              </a:rPr>
+              <a:t>굳혀두면</a:t>
             </a:r>
             <a:r>
               <a:rPr lang="ko-KR" altLang="en-US" sz="1500" b="1" dirty="0">
                 <a:solidFill>
+                  <a:srgbClr val="34D399"/>
+                </a:solidFill>
+              </a:rPr>
+              <a:t> </a:t>
+            </a:r>
+            <a:r>
+              <a:rPr lang="ko-KR" altLang="en-US" sz="1500" b="1" dirty="0">
+                <a:solidFill>
                   <a:srgbClr val="1E2761"/>
                 </a:solidFill>
               </a:rPr>
-              <a:t>, 누가 언제 실행해도 재현된다</a:t>
-            </a:r>
-            <a:endParaRPr lang="en-US" sz="1500" dirty="0"/>
+              <a:t>일관된 품질과 기준을 가진 결과물 도출</a:t>
+            </a:r>
+            <a:endParaRPr lang="en-US" sz="1500" b="1" dirty="0">
+              <a:solidFill>
+                <a:srgbClr val="1E2761"/>
+              </a:solidFill>
+            </a:endParaRPr>
           </a:p>
         </p:txBody>
       </p:sp>
